--- a/dist/초6/국어/읽기와비판/초6_국어_읽기와비판_03_근거의타당성.pptx
+++ b/dist/초6/국어/읽기와비판/초6_국어_읽기와비판_03_근거의타당성.pptx
@@ -120,13 +120,13 @@
   <p:extLst>
     <p:ext uri="{521415D9-36F7-43E2-AB2F-B90AF26B5E84}">
       <p14:sectionLst xmlns:p14="http://schemas.microsoft.com/office/powerpoint/2010/main">
-        <p14:section name="도입" id="{72559cac-f058-5639-0e72-87368a4cf06f}">
+        <p14:section name="도입" id="{b0d615b8-b32c-3bc7-d580-8ff450d9a87e}">
           <p14:sldIdLst>
             <p14:sldId id="256"/>
             <p14:sldId id="257"/>
           </p14:sldIdLst>
         </p14:section>
-        <p14:section name="개념" id="{6b1eabed-87a3-ae1c-59e8-c3c1a9e8b1bd}">
+        <p14:section name="개념" id="{f6739871-aeb2-66b5-674a-90dd871c051c}">
           <p14:sldIdLst>
             <p14:sldId id="258"/>
             <p14:sldId id="259"/>
@@ -134,26 +134,26 @@
             <p14:sldId id="261"/>
           </p14:sldIdLst>
         </p14:section>
-        <p14:section name="연습" id="{4749504b-b110-c7a4-f198-a6cc4c683367}">
+        <p14:section name="연습" id="{b4962134-bf28-4528-a74b-529d4e5d1631}">
           <p14:sldIdLst>
             <p14:sldId id="262"/>
             <p14:sldId id="263"/>
             <p14:sldId id="264"/>
           </p14:sldIdLst>
         </p14:section>
-        <p14:section name="확인" id="{d5e45ae9-59ad-779c-d6c5-066c65f8f632}">
+        <p14:section name="확인" id="{1ee75a81-8756-54b8-20b4-ce58cbee2eaa}">
           <p14:sldIdLst>
             <p14:sldId id="265"/>
             <p14:sldId id="266"/>
             <p14:sldId id="267"/>
           </p14:sldIdLst>
         </p14:section>
-        <p14:section name="정리" id="{40a56682-6403-048c-1499-843547a7dd91}">
+        <p14:section name="정리" id="{8dbc424c-72a9-91bd-9abe-c5648b5b9bfd}">
           <p14:sldIdLst>
             <p14:sldId id="268"/>
           </p14:sldIdLst>
         </p14:section>
-        <p14:section name="보충" id="{f249f4c9-9a8b-5baf-ee65-2c8204a4e179}">
+        <p14:section name="보충" id="{4be30108-24fe-cd58-8535-36e86617b91d}">
           <p14:sldIdLst>
             <p14:sldId id="269"/>
           </p14:sldIdLst>
@@ -7516,7 +7516,7 @@
           </p:nvPr>
         </p:nvGraphicFramePr>
         <p:xfrm>
-          <a:off x="608076" y="2483485"/>
+          <a:off x="608076" y="2439670"/>
           <a:ext cx="10972800" cy="914400"/>
         </p:xfrm>
         <a:graphic>
@@ -7528,7 +7528,7 @@
                 <a:gridCol w="4169664"/>
                 <a:gridCol w="5047488"/>
               </a:tblGrid>
-              <a:tr h="433070">
+              <a:tr h="450596">
                 <a:tc>
                   <a:txBody>
                     <a:bodyPr/>
@@ -7723,7 +7723,7 @@
                   </a:tcPr>
                 </a:tc>
               </a:tr>
-              <a:tr h="433070">
+              <a:tr h="450596">
                 <a:tc>
                   <a:txBody>
                     <a:bodyPr/>
@@ -7929,7 +7929,7 @@
                   </a:tcPr>
                 </a:tc>
               </a:tr>
-              <a:tr h="433070">
+              <a:tr h="450596">
                 <a:tc>
                   <a:txBody>
                     <a:bodyPr/>
@@ -8135,7 +8135,7 @@
                   </a:tcPr>
                 </a:tc>
               </a:tr>
-              <a:tr h="433070">
+              <a:tr h="450596">
                 <a:tc>
                   <a:txBody>
                     <a:bodyPr/>
@@ -8341,7 +8341,7 @@
                   </a:tcPr>
                 </a:tc>
               </a:tr>
-              <a:tr h="433070">
+              <a:tr h="450596">
                 <a:tc>
                   <a:txBody>
                     <a:bodyPr/>
